--- a/十架犧牲的愛.pptx
+++ b/十架犧牲的愛.pptx
@@ -5,11 +5,14 @@
     <p:sldMasterId id="2147483660" r:id="rId1"/>
   </p:sldMasterIdLst>
   <p:sldIdLst>
-    <p:sldId id="257" r:id="rId2"/>
-    <p:sldId id="258" r:id="rId3"/>
-    <p:sldId id="259" r:id="rId4"/>
-    <p:sldId id="260" r:id="rId5"/>
-    <p:sldId id="261" r:id="rId6"/>
+    <p:sldId id="585" r:id="rId2"/>
+    <p:sldId id="586" r:id="rId3"/>
+    <p:sldId id="587" r:id="rId4"/>
+    <p:sldId id="588" r:id="rId5"/>
+    <p:sldId id="589" r:id="rId6"/>
+    <p:sldId id="590" r:id="rId7"/>
+    <p:sldId id="591" r:id="rId8"/>
+    <p:sldId id="592" r:id="rId9"/>
   </p:sldIdLst>
   <p:sldSz cx="12192000" cy="6858000"/>
   <p:notesSz cx="6858000" cy="9144000"/>
@@ -165,7 +168,7 @@
           <a:lstStyle/>
           <a:p>
             <a:r>
-              <a:rPr lang="en-US" altLang="zh-TW" smtClean="0"/>
+              <a:rPr lang="en-US" altLang="zh-TW"/>
               <a:t>Click to edit Master title style</a:t>
             </a:r>
             <a:endParaRPr lang="zh-TW" altLang="en-US"/>
@@ -284,7 +287,7 @@
           </a:lstStyle>
           <a:p>
             <a:r>
-              <a:rPr lang="en-US" altLang="zh-TW" smtClean="0"/>
+              <a:rPr lang="en-US" altLang="zh-TW"/>
               <a:t>Click to edit Master subtitle style</a:t>
             </a:r>
             <a:endParaRPr lang="zh-TW" altLang="en-US"/>
@@ -308,7 +311,7 @@
           <a:p>
             <a:fld id="{748BF823-816E-4CE2-AAFF-78D1B56BB1CC}" type="datetimeFigureOut">
               <a:rPr lang="zh-TW" altLang="en-US" smtClean="0"/>
-              <a:t>2020/3/28</a:t>
+              <a:t>2024/5/4</a:t>
             </a:fld>
             <a:endParaRPr lang="zh-TW" altLang="en-US"/>
           </a:p>
@@ -402,7 +405,7 @@
           <a:lstStyle/>
           <a:p>
             <a:r>
-              <a:rPr lang="en-US" altLang="zh-TW" smtClean="0"/>
+              <a:rPr lang="en-US" altLang="zh-TW"/>
               <a:t>Click to edit Master title style</a:t>
             </a:r>
             <a:endParaRPr lang="zh-TW" altLang="en-US"/>
@@ -426,35 +429,35 @@
           <a:p>
             <a:pPr lvl="0"/>
             <a:r>
-              <a:rPr lang="en-US" altLang="zh-TW" smtClean="0"/>
+              <a:rPr lang="en-US" altLang="zh-TW"/>
               <a:t>Edit Master text styles</a:t>
             </a:r>
           </a:p>
           <a:p>
             <a:pPr lvl="1"/>
             <a:r>
-              <a:rPr lang="en-US" altLang="zh-TW" smtClean="0"/>
+              <a:rPr lang="en-US" altLang="zh-TW"/>
               <a:t>Second level</a:t>
             </a:r>
           </a:p>
           <a:p>
             <a:pPr lvl="2"/>
             <a:r>
-              <a:rPr lang="en-US" altLang="zh-TW" smtClean="0"/>
+              <a:rPr lang="en-US" altLang="zh-TW"/>
               <a:t>Third level</a:t>
             </a:r>
           </a:p>
           <a:p>
             <a:pPr lvl="3"/>
             <a:r>
-              <a:rPr lang="en-US" altLang="zh-TW" smtClean="0"/>
+              <a:rPr lang="en-US" altLang="zh-TW"/>
               <a:t>Fourth level</a:t>
             </a:r>
           </a:p>
           <a:p>
             <a:pPr lvl="4"/>
             <a:r>
-              <a:rPr lang="en-US" altLang="zh-TW" smtClean="0"/>
+              <a:rPr lang="en-US" altLang="zh-TW"/>
               <a:t>Fifth level</a:t>
             </a:r>
             <a:endParaRPr lang="zh-TW" altLang="en-US"/>
@@ -478,7 +481,7 @@
           <a:p>
             <a:fld id="{748BF823-816E-4CE2-AAFF-78D1B56BB1CC}" type="datetimeFigureOut">
               <a:rPr lang="zh-TW" altLang="en-US" smtClean="0"/>
-              <a:t>2020/3/28</a:t>
+              <a:t>2024/5/4</a:t>
             </a:fld>
             <a:endParaRPr lang="zh-TW" altLang="en-US"/>
           </a:p>
@@ -577,7 +580,7 @@
           <a:lstStyle/>
           <a:p>
             <a:r>
-              <a:rPr lang="en-US" altLang="zh-TW" smtClean="0"/>
+              <a:rPr lang="en-US" altLang="zh-TW"/>
               <a:t>Click to edit Master title style</a:t>
             </a:r>
             <a:endParaRPr lang="zh-TW" altLang="en-US"/>
@@ -606,35 +609,35 @@
           <a:p>
             <a:pPr lvl="0"/>
             <a:r>
-              <a:rPr lang="en-US" altLang="zh-TW" smtClean="0"/>
+              <a:rPr lang="en-US" altLang="zh-TW"/>
               <a:t>Edit Master text styles</a:t>
             </a:r>
           </a:p>
           <a:p>
             <a:pPr lvl="1"/>
             <a:r>
-              <a:rPr lang="en-US" altLang="zh-TW" smtClean="0"/>
+              <a:rPr lang="en-US" altLang="zh-TW"/>
               <a:t>Second level</a:t>
             </a:r>
           </a:p>
           <a:p>
             <a:pPr lvl="2"/>
             <a:r>
-              <a:rPr lang="en-US" altLang="zh-TW" smtClean="0"/>
+              <a:rPr lang="en-US" altLang="zh-TW"/>
               <a:t>Third level</a:t>
             </a:r>
           </a:p>
           <a:p>
             <a:pPr lvl="3"/>
             <a:r>
-              <a:rPr lang="en-US" altLang="zh-TW" smtClean="0"/>
+              <a:rPr lang="en-US" altLang="zh-TW"/>
               <a:t>Fourth level</a:t>
             </a:r>
           </a:p>
           <a:p>
             <a:pPr lvl="4"/>
             <a:r>
-              <a:rPr lang="en-US" altLang="zh-TW" smtClean="0"/>
+              <a:rPr lang="en-US" altLang="zh-TW"/>
               <a:t>Fifth level</a:t>
             </a:r>
             <a:endParaRPr lang="zh-TW" altLang="en-US"/>
@@ -658,7 +661,7 @@
           <a:p>
             <a:fld id="{748BF823-816E-4CE2-AAFF-78D1B56BB1CC}" type="datetimeFigureOut">
               <a:rPr lang="zh-TW" altLang="en-US" smtClean="0"/>
-              <a:t>2020/3/28</a:t>
+              <a:t>2024/5/4</a:t>
             </a:fld>
             <a:endParaRPr lang="zh-TW" altLang="en-US"/>
           </a:p>
@@ -752,7 +755,7 @@
           <a:lstStyle/>
           <a:p>
             <a:r>
-              <a:rPr lang="en-US" altLang="zh-TW" smtClean="0"/>
+              <a:rPr lang="en-US" altLang="zh-TW"/>
               <a:t>Click to edit Master title style</a:t>
             </a:r>
             <a:endParaRPr lang="zh-TW" altLang="en-US"/>
@@ -776,35 +779,35 @@
           <a:p>
             <a:pPr lvl="0"/>
             <a:r>
-              <a:rPr lang="en-US" altLang="zh-TW" smtClean="0"/>
+              <a:rPr lang="en-US" altLang="zh-TW"/>
               <a:t>Edit Master text styles</a:t>
             </a:r>
           </a:p>
           <a:p>
             <a:pPr lvl="1"/>
             <a:r>
-              <a:rPr lang="en-US" altLang="zh-TW" smtClean="0"/>
+              <a:rPr lang="en-US" altLang="zh-TW"/>
               <a:t>Second level</a:t>
             </a:r>
           </a:p>
           <a:p>
             <a:pPr lvl="2"/>
             <a:r>
-              <a:rPr lang="en-US" altLang="zh-TW" smtClean="0"/>
+              <a:rPr lang="en-US" altLang="zh-TW"/>
               <a:t>Third level</a:t>
             </a:r>
           </a:p>
           <a:p>
             <a:pPr lvl="3"/>
             <a:r>
-              <a:rPr lang="en-US" altLang="zh-TW" smtClean="0"/>
+              <a:rPr lang="en-US" altLang="zh-TW"/>
               <a:t>Fourth level</a:t>
             </a:r>
           </a:p>
           <a:p>
             <a:pPr lvl="4"/>
             <a:r>
-              <a:rPr lang="en-US" altLang="zh-TW" smtClean="0"/>
+              <a:rPr lang="en-US" altLang="zh-TW"/>
               <a:t>Fifth level</a:t>
             </a:r>
             <a:endParaRPr lang="zh-TW" altLang="en-US"/>
@@ -828,7 +831,7 @@
           <a:p>
             <a:fld id="{748BF823-816E-4CE2-AAFF-78D1B56BB1CC}" type="datetimeFigureOut">
               <a:rPr lang="zh-TW" altLang="en-US" smtClean="0"/>
-              <a:t>2020/3/28</a:t>
+              <a:t>2024/5/4</a:t>
             </a:fld>
             <a:endParaRPr lang="zh-TW" altLang="en-US"/>
           </a:p>
@@ -931,7 +934,7 @@
           </a:lstStyle>
           <a:p>
             <a:r>
-              <a:rPr lang="en-US" altLang="zh-TW" smtClean="0"/>
+              <a:rPr lang="en-US" altLang="zh-TW"/>
               <a:t>Click to edit Master title style</a:t>
             </a:r>
             <a:endParaRPr lang="zh-TW" altLang="en-US"/>
@@ -1051,7 +1054,7 @@
           <a:p>
             <a:pPr lvl="0"/>
             <a:r>
-              <a:rPr lang="en-US" altLang="zh-TW" smtClean="0"/>
+              <a:rPr lang="en-US" altLang="zh-TW"/>
               <a:t>Edit Master text styles</a:t>
             </a:r>
           </a:p>
@@ -1074,7 +1077,7 @@
           <a:p>
             <a:fld id="{748BF823-816E-4CE2-AAFF-78D1B56BB1CC}" type="datetimeFigureOut">
               <a:rPr lang="zh-TW" altLang="en-US" smtClean="0"/>
-              <a:t>2020/3/28</a:t>
+              <a:t>2024/5/4</a:t>
             </a:fld>
             <a:endParaRPr lang="zh-TW" altLang="en-US"/>
           </a:p>
@@ -1168,7 +1171,7 @@
           <a:lstStyle/>
           <a:p>
             <a:r>
-              <a:rPr lang="en-US" altLang="zh-TW" smtClean="0"/>
+              <a:rPr lang="en-US" altLang="zh-TW"/>
               <a:t>Click to edit Master title style</a:t>
             </a:r>
             <a:endParaRPr lang="zh-TW" altLang="en-US"/>
@@ -1225,35 +1228,35 @@
           <a:p>
             <a:pPr lvl="0"/>
             <a:r>
-              <a:rPr lang="en-US" altLang="zh-TW" smtClean="0"/>
+              <a:rPr lang="en-US" altLang="zh-TW"/>
               <a:t>Edit Master text styles</a:t>
             </a:r>
           </a:p>
           <a:p>
             <a:pPr lvl="1"/>
             <a:r>
-              <a:rPr lang="en-US" altLang="zh-TW" smtClean="0"/>
+              <a:rPr lang="en-US" altLang="zh-TW"/>
               <a:t>Second level</a:t>
             </a:r>
           </a:p>
           <a:p>
             <a:pPr lvl="2"/>
             <a:r>
-              <a:rPr lang="en-US" altLang="zh-TW" smtClean="0"/>
+              <a:rPr lang="en-US" altLang="zh-TW"/>
               <a:t>Third level</a:t>
             </a:r>
           </a:p>
           <a:p>
             <a:pPr lvl="3"/>
             <a:r>
-              <a:rPr lang="en-US" altLang="zh-TW" smtClean="0"/>
+              <a:rPr lang="en-US" altLang="zh-TW"/>
               <a:t>Fourth level</a:t>
             </a:r>
           </a:p>
           <a:p>
             <a:pPr lvl="4"/>
             <a:r>
-              <a:rPr lang="en-US" altLang="zh-TW" smtClean="0"/>
+              <a:rPr lang="en-US" altLang="zh-TW"/>
               <a:t>Fifth level</a:t>
             </a:r>
             <a:endParaRPr lang="zh-TW" altLang="en-US"/>
@@ -1310,35 +1313,35 @@
           <a:p>
             <a:pPr lvl="0"/>
             <a:r>
-              <a:rPr lang="en-US" altLang="zh-TW" smtClean="0"/>
+              <a:rPr lang="en-US" altLang="zh-TW"/>
               <a:t>Edit Master text styles</a:t>
             </a:r>
           </a:p>
           <a:p>
             <a:pPr lvl="1"/>
             <a:r>
-              <a:rPr lang="en-US" altLang="zh-TW" smtClean="0"/>
+              <a:rPr lang="en-US" altLang="zh-TW"/>
               <a:t>Second level</a:t>
             </a:r>
           </a:p>
           <a:p>
             <a:pPr lvl="2"/>
             <a:r>
-              <a:rPr lang="en-US" altLang="zh-TW" smtClean="0"/>
+              <a:rPr lang="en-US" altLang="zh-TW"/>
               <a:t>Third level</a:t>
             </a:r>
           </a:p>
           <a:p>
             <a:pPr lvl="3"/>
             <a:r>
-              <a:rPr lang="en-US" altLang="zh-TW" smtClean="0"/>
+              <a:rPr lang="en-US" altLang="zh-TW"/>
               <a:t>Fourth level</a:t>
             </a:r>
           </a:p>
           <a:p>
             <a:pPr lvl="4"/>
             <a:r>
-              <a:rPr lang="en-US" altLang="zh-TW" smtClean="0"/>
+              <a:rPr lang="en-US" altLang="zh-TW"/>
               <a:t>Fifth level</a:t>
             </a:r>
             <a:endParaRPr lang="zh-TW" altLang="en-US"/>
@@ -1362,7 +1365,7 @@
           <a:p>
             <a:fld id="{748BF823-816E-4CE2-AAFF-78D1B56BB1CC}" type="datetimeFigureOut">
               <a:rPr lang="zh-TW" altLang="en-US" smtClean="0"/>
-              <a:t>2020/3/28</a:t>
+              <a:t>2024/5/4</a:t>
             </a:fld>
             <a:endParaRPr lang="zh-TW" altLang="en-US"/>
           </a:p>
@@ -1460,7 +1463,7 @@
           </a:lstStyle>
           <a:p>
             <a:r>
-              <a:rPr lang="en-US" altLang="zh-TW" smtClean="0"/>
+              <a:rPr lang="en-US" altLang="zh-TW"/>
               <a:t>Click to edit Master title style</a:t>
             </a:r>
             <a:endParaRPr lang="zh-TW" altLang="en-US"/>
@@ -1526,7 +1529,7 @@
           <a:p>
             <a:pPr lvl="0"/>
             <a:r>
-              <a:rPr lang="en-US" altLang="zh-TW" smtClean="0"/>
+              <a:rPr lang="en-US" altLang="zh-TW"/>
               <a:t>Edit Master text styles</a:t>
             </a:r>
           </a:p>
@@ -1582,35 +1585,35 @@
           <a:p>
             <a:pPr lvl="0"/>
             <a:r>
-              <a:rPr lang="en-US" altLang="zh-TW" smtClean="0"/>
+              <a:rPr lang="en-US" altLang="zh-TW"/>
               <a:t>Edit Master text styles</a:t>
             </a:r>
           </a:p>
           <a:p>
             <a:pPr lvl="1"/>
             <a:r>
-              <a:rPr lang="en-US" altLang="zh-TW" smtClean="0"/>
+              <a:rPr lang="en-US" altLang="zh-TW"/>
               <a:t>Second level</a:t>
             </a:r>
           </a:p>
           <a:p>
             <a:pPr lvl="2"/>
             <a:r>
-              <a:rPr lang="en-US" altLang="zh-TW" smtClean="0"/>
+              <a:rPr lang="en-US" altLang="zh-TW"/>
               <a:t>Third level</a:t>
             </a:r>
           </a:p>
           <a:p>
             <a:pPr lvl="3"/>
             <a:r>
-              <a:rPr lang="en-US" altLang="zh-TW" smtClean="0"/>
+              <a:rPr lang="en-US" altLang="zh-TW"/>
               <a:t>Fourth level</a:t>
             </a:r>
           </a:p>
           <a:p>
             <a:pPr lvl="4"/>
             <a:r>
-              <a:rPr lang="en-US" altLang="zh-TW" smtClean="0"/>
+              <a:rPr lang="en-US" altLang="zh-TW"/>
               <a:t>Fifth level</a:t>
             </a:r>
             <a:endParaRPr lang="zh-TW" altLang="en-US"/>
@@ -1676,7 +1679,7 @@
           <a:p>
             <a:pPr lvl="0"/>
             <a:r>
-              <a:rPr lang="en-US" altLang="zh-TW" smtClean="0"/>
+              <a:rPr lang="en-US" altLang="zh-TW"/>
               <a:t>Edit Master text styles</a:t>
             </a:r>
           </a:p>
@@ -1732,35 +1735,35 @@
           <a:p>
             <a:pPr lvl="0"/>
             <a:r>
-              <a:rPr lang="en-US" altLang="zh-TW" smtClean="0"/>
+              <a:rPr lang="en-US" altLang="zh-TW"/>
               <a:t>Edit Master text styles</a:t>
             </a:r>
           </a:p>
           <a:p>
             <a:pPr lvl="1"/>
             <a:r>
-              <a:rPr lang="en-US" altLang="zh-TW" smtClean="0"/>
+              <a:rPr lang="en-US" altLang="zh-TW"/>
               <a:t>Second level</a:t>
             </a:r>
           </a:p>
           <a:p>
             <a:pPr lvl="2"/>
             <a:r>
-              <a:rPr lang="en-US" altLang="zh-TW" smtClean="0"/>
+              <a:rPr lang="en-US" altLang="zh-TW"/>
               <a:t>Third level</a:t>
             </a:r>
           </a:p>
           <a:p>
             <a:pPr lvl="3"/>
             <a:r>
-              <a:rPr lang="en-US" altLang="zh-TW" smtClean="0"/>
+              <a:rPr lang="en-US" altLang="zh-TW"/>
               <a:t>Fourth level</a:t>
             </a:r>
           </a:p>
           <a:p>
             <a:pPr lvl="4"/>
             <a:r>
-              <a:rPr lang="en-US" altLang="zh-TW" smtClean="0"/>
+              <a:rPr lang="en-US" altLang="zh-TW"/>
               <a:t>Fifth level</a:t>
             </a:r>
             <a:endParaRPr lang="zh-TW" altLang="en-US"/>
@@ -1784,7 +1787,7 @@
           <a:p>
             <a:fld id="{748BF823-816E-4CE2-AAFF-78D1B56BB1CC}" type="datetimeFigureOut">
               <a:rPr lang="zh-TW" altLang="en-US" smtClean="0"/>
-              <a:t>2020/3/28</a:t>
+              <a:t>2024/5/4</a:t>
             </a:fld>
             <a:endParaRPr lang="zh-TW" altLang="en-US"/>
           </a:p>
@@ -1878,7 +1881,7 @@
           <a:lstStyle/>
           <a:p>
             <a:r>
-              <a:rPr lang="en-US" altLang="zh-TW" smtClean="0"/>
+              <a:rPr lang="en-US" altLang="zh-TW"/>
               <a:t>Click to edit Master title style</a:t>
             </a:r>
             <a:endParaRPr lang="zh-TW" altLang="en-US"/>
@@ -1902,7 +1905,7 @@
           <a:p>
             <a:fld id="{748BF823-816E-4CE2-AAFF-78D1B56BB1CC}" type="datetimeFigureOut">
               <a:rPr lang="zh-TW" altLang="en-US" smtClean="0"/>
-              <a:t>2020/3/28</a:t>
+              <a:t>2024/5/4</a:t>
             </a:fld>
             <a:endParaRPr lang="zh-TW" altLang="en-US"/>
           </a:p>
@@ -1997,7 +2000,7 @@
           <a:p>
             <a:fld id="{748BF823-816E-4CE2-AAFF-78D1B56BB1CC}" type="datetimeFigureOut">
               <a:rPr lang="zh-TW" altLang="en-US" smtClean="0"/>
-              <a:t>2020/3/28</a:t>
+              <a:t>2024/5/4</a:t>
             </a:fld>
             <a:endParaRPr lang="zh-TW" altLang="en-US"/>
           </a:p>
@@ -2100,7 +2103,7 @@
           </a:lstStyle>
           <a:p>
             <a:r>
-              <a:rPr lang="en-US" altLang="zh-TW" smtClean="0"/>
+              <a:rPr lang="en-US" altLang="zh-TW"/>
               <a:t>Click to edit Master title style</a:t>
             </a:r>
             <a:endParaRPr lang="zh-TW" altLang="en-US"/>
@@ -2157,35 +2160,35 @@
           <a:p>
             <a:pPr lvl="0"/>
             <a:r>
-              <a:rPr lang="en-US" altLang="zh-TW" smtClean="0"/>
+              <a:rPr lang="en-US" altLang="zh-TW"/>
               <a:t>Edit Master text styles</a:t>
             </a:r>
           </a:p>
           <a:p>
             <a:pPr lvl="1"/>
             <a:r>
-              <a:rPr lang="en-US" altLang="zh-TW" smtClean="0"/>
+              <a:rPr lang="en-US" altLang="zh-TW"/>
               <a:t>Second level</a:t>
             </a:r>
           </a:p>
           <a:p>
             <a:pPr lvl="2"/>
             <a:r>
-              <a:rPr lang="en-US" altLang="zh-TW" smtClean="0"/>
+              <a:rPr lang="en-US" altLang="zh-TW"/>
               <a:t>Third level</a:t>
             </a:r>
           </a:p>
           <a:p>
             <a:pPr lvl="3"/>
             <a:r>
-              <a:rPr lang="en-US" altLang="zh-TW" smtClean="0"/>
+              <a:rPr lang="en-US" altLang="zh-TW"/>
               <a:t>Fourth level</a:t>
             </a:r>
           </a:p>
           <a:p>
             <a:pPr lvl="4"/>
             <a:r>
-              <a:rPr lang="en-US" altLang="zh-TW" smtClean="0"/>
+              <a:rPr lang="en-US" altLang="zh-TW"/>
               <a:t>Fifth level</a:t>
             </a:r>
             <a:endParaRPr lang="zh-TW" altLang="en-US"/>
@@ -2251,7 +2254,7 @@
           <a:p>
             <a:pPr lvl="0"/>
             <a:r>
-              <a:rPr lang="en-US" altLang="zh-TW" smtClean="0"/>
+              <a:rPr lang="en-US" altLang="zh-TW"/>
               <a:t>Edit Master text styles</a:t>
             </a:r>
           </a:p>
@@ -2274,7 +2277,7 @@
           <a:p>
             <a:fld id="{748BF823-816E-4CE2-AAFF-78D1B56BB1CC}" type="datetimeFigureOut">
               <a:rPr lang="zh-TW" altLang="en-US" smtClean="0"/>
-              <a:t>2020/3/28</a:t>
+              <a:t>2024/5/4</a:t>
             </a:fld>
             <a:endParaRPr lang="zh-TW" altLang="en-US"/>
           </a:p>
@@ -2377,7 +2380,7 @@
           </a:lstStyle>
           <a:p>
             <a:r>
-              <a:rPr lang="en-US" altLang="zh-TW" smtClean="0"/>
+              <a:rPr lang="en-US" altLang="zh-TW"/>
               <a:t>Click to edit Master title style</a:t>
             </a:r>
             <a:endParaRPr lang="zh-TW" altLang="en-US"/>
@@ -2442,7 +2445,7 @@
           </a:lstStyle>
           <a:p>
             <a:r>
-              <a:rPr lang="en-US" altLang="zh-TW" smtClean="0"/>
+              <a:rPr lang="en-US" altLang="zh-TW"/>
               <a:t>Click icon to add picture</a:t>
             </a:r>
             <a:endParaRPr lang="zh-TW" altLang="en-US"/>
@@ -2508,7 +2511,7 @@
           <a:p>
             <a:pPr lvl="0"/>
             <a:r>
-              <a:rPr lang="en-US" altLang="zh-TW" smtClean="0"/>
+              <a:rPr lang="en-US" altLang="zh-TW"/>
               <a:t>Edit Master text styles</a:t>
             </a:r>
           </a:p>
@@ -2531,7 +2534,7 @@
           <a:p>
             <a:fld id="{748BF823-816E-4CE2-AAFF-78D1B56BB1CC}" type="datetimeFigureOut">
               <a:rPr lang="zh-TW" altLang="en-US" smtClean="0"/>
-              <a:t>2020/3/28</a:t>
+              <a:t>2024/5/4</a:t>
             </a:fld>
             <a:endParaRPr lang="zh-TW" altLang="en-US"/>
           </a:p>
@@ -2645,10 +2648,9 @@
           <a:lstStyle/>
           <a:p>
             <a:r>
-              <a:rPr lang="zh-TW" altLang="en-US" smtClean="0"/>
+              <a:rPr lang="zh-TW" altLang="en-US"/>
               <a:t>按一下以編輯母片標題樣式</a:t>
             </a:r>
-            <a:endParaRPr lang="zh-TW" altLang="en-US"/>
           </a:p>
         </p:txBody>
       </p:sp>
@@ -2679,38 +2681,37 @@
           <a:p>
             <a:pPr lvl="0"/>
             <a:r>
-              <a:rPr lang="zh-TW" altLang="en-US" smtClean="0"/>
+              <a:rPr lang="zh-TW" altLang="en-US"/>
               <a:t>按一下以編輯母片文字樣式</a:t>
             </a:r>
           </a:p>
           <a:p>
             <a:pPr lvl="1"/>
             <a:r>
-              <a:rPr lang="zh-TW" altLang="en-US" smtClean="0"/>
+              <a:rPr lang="zh-TW" altLang="en-US"/>
               <a:t>第二層</a:t>
             </a:r>
           </a:p>
           <a:p>
             <a:pPr lvl="2"/>
             <a:r>
-              <a:rPr lang="zh-TW" altLang="en-US" smtClean="0"/>
+              <a:rPr lang="zh-TW" altLang="en-US"/>
               <a:t>第三層</a:t>
             </a:r>
           </a:p>
           <a:p>
             <a:pPr lvl="3"/>
             <a:r>
-              <a:rPr lang="zh-TW" altLang="en-US" smtClean="0"/>
+              <a:rPr lang="zh-TW" altLang="en-US"/>
               <a:t>第四層</a:t>
             </a:r>
           </a:p>
           <a:p>
             <a:pPr lvl="4"/>
             <a:r>
-              <a:rPr lang="zh-TW" altLang="en-US" smtClean="0"/>
+              <a:rPr lang="zh-TW" altLang="en-US"/>
               <a:t>第五層</a:t>
             </a:r>
-            <a:endParaRPr lang="zh-TW" altLang="en-US"/>
           </a:p>
         </p:txBody>
       </p:sp>
@@ -2749,7 +2750,7 @@
           <a:p>
             <a:fld id="{748BF823-816E-4CE2-AAFF-78D1B56BB1CC}" type="datetimeFigureOut">
               <a:rPr lang="zh-TW" altLang="en-US" smtClean="0"/>
-              <a:t>2020/3/28</a:t>
+              <a:t>2024/5/4</a:t>
             </a:fld>
             <a:endParaRPr lang="zh-TW" altLang="en-US"/>
           </a:p>
@@ -3126,7 +3127,7 @@
       </p:grpSpPr>
       <p:sp>
         <p:nvSpPr>
-          <p:cNvPr id="2" name="標題 1"/>
+          <p:cNvPr id="4" name="標題 3"/>
           <p:cNvSpPr>
             <a:spLocks noGrp="1"/>
           </p:cNvSpPr>
@@ -3134,170 +3135,35 @@
             <p:ph type="title"/>
           </p:nvPr>
         </p:nvSpPr>
-        <p:spPr/>
+        <p:spPr>
+          <a:xfrm>
+            <a:off x="0" y="2660915"/>
+            <a:ext cx="12192000" cy="1143000"/>
+          </a:xfrm>
+        </p:spPr>
         <p:txBody>
           <a:bodyPr>
-            <a:normAutofit/>
+            <a:noAutofit/>
           </a:bodyPr>
           <a:lstStyle/>
           <a:p>
             <a:r>
-              <a:rPr lang="zh-TW" altLang="en-US" sz="4800" b="1" dirty="0">
+              <a:rPr lang="zh-TW" altLang="en-US" sz="7200" b="1" i="1" dirty="0">
+                <a:solidFill>
+                  <a:srgbClr val="660033"/>
+                </a:solidFill>
+                <a:effectLst>
+                  <a:outerShdw blurRad="38100" dist="38100" dir="2700000" algn="tl">
+                    <a:srgbClr val="000000">
+                      <a:alpha val="43137"/>
+                    </a:srgbClr>
+                  </a:outerShdw>
+                </a:effectLst>
                 <a:latin typeface="微軟正黑體" pitchFamily="34" charset="-120"/>
                 <a:ea typeface="微軟正黑體" pitchFamily="34" charset="-120"/>
               </a:rPr>
               <a:t>十架犧牲的愛</a:t>
             </a:r>
-          </a:p>
-        </p:txBody>
-      </p:sp>
-      <p:sp>
-        <p:nvSpPr>
-          <p:cNvPr id="3" name="內容版面配置區 2"/>
-          <p:cNvSpPr>
-            <a:spLocks noGrp="1"/>
-          </p:cNvSpPr>
-          <p:nvPr>
-            <p:ph idx="1"/>
-          </p:nvPr>
-        </p:nvSpPr>
-        <p:spPr>
-          <a:xfrm>
-            <a:off x="0" y="1600201"/>
-            <a:ext cx="12192000" cy="4525963"/>
-          </a:xfrm>
-        </p:spPr>
-        <p:txBody>
-          <a:bodyPr>
-            <a:normAutofit/>
-          </a:bodyPr>
-          <a:lstStyle/>
-          <a:p>
-            <a:pPr algn="ctr">
-              <a:buNone/>
-            </a:pPr>
-            <a:r>
-              <a:rPr lang="zh-TW" altLang="en-US" sz="5400" b="1" dirty="0">
-                <a:latin typeface="微軟正黑體" pitchFamily="34" charset="-120"/>
-                <a:ea typeface="微軟正黑體" pitchFamily="34" charset="-120"/>
-              </a:rPr>
-              <a:t>耶穌捨身十</a:t>
-            </a:r>
-            <a:r>
-              <a:rPr lang="zh-TW" altLang="en-US" sz="5400" b="1" dirty="0">
-                <a:latin typeface="微軟正黑體" pitchFamily="34" charset="-120"/>
-                <a:ea typeface="微軟正黑體" pitchFamily="34" charset="-120"/>
-              </a:rPr>
-              <a:t>架</a:t>
-            </a:r>
-            <a:endParaRPr lang="en-US" altLang="zh-TW" sz="5400" b="1" dirty="0">
-              <a:latin typeface="微軟正黑體" pitchFamily="34" charset="-120"/>
-              <a:ea typeface="微軟正黑體" pitchFamily="34" charset="-120"/>
-            </a:endParaRPr>
-          </a:p>
-          <a:p>
-            <a:pPr algn="ctr">
-              <a:buNone/>
-            </a:pPr>
-            <a:r>
-              <a:rPr lang="zh-TW" altLang="en-US" sz="5400" b="1" dirty="0" smtClean="0">
-                <a:latin typeface="微軟正黑體" pitchFamily="34" charset="-120"/>
-                <a:ea typeface="微軟正黑體" pitchFamily="34" charset="-120"/>
-              </a:rPr>
-              <a:t>主</a:t>
-            </a:r>
-            <a:r>
-              <a:rPr lang="zh-CN" altLang="en-US" sz="5400" b="1" dirty="0">
-                <a:latin typeface="微軟正黑體" pitchFamily="34" charset="-120"/>
-                <a:ea typeface="微軟正黑體" pitchFamily="34" charset="-120"/>
-              </a:rPr>
-              <a:t>袮</a:t>
-            </a:r>
-            <a:r>
-              <a:rPr lang="zh-TW" altLang="en-US" sz="5400" b="1" dirty="0" smtClean="0">
-                <a:latin typeface="微軟正黑體" pitchFamily="34" charset="-120"/>
-                <a:ea typeface="微軟正黑體" pitchFamily="34" charset="-120"/>
-              </a:rPr>
-              <a:t>為</a:t>
-            </a:r>
-            <a:r>
-              <a:rPr lang="zh-TW" altLang="en-US" sz="5400" b="1" dirty="0">
-                <a:latin typeface="微軟正黑體" pitchFamily="34" charset="-120"/>
-                <a:ea typeface="微軟正黑體" pitchFamily="34" charset="-120"/>
-              </a:rPr>
-              <a:t>我</a:t>
-            </a:r>
-            <a:r>
-              <a:rPr lang="zh-TW" altLang="en-US" sz="5400" b="1" dirty="0">
-                <a:latin typeface="微軟正黑體" pitchFamily="34" charset="-120"/>
-                <a:ea typeface="微軟正黑體" pitchFamily="34" charset="-120"/>
-              </a:rPr>
-              <a:t>犧牲</a:t>
-            </a:r>
-            <a:endParaRPr lang="en-US" altLang="zh-TW" sz="5400" b="1" dirty="0">
-              <a:latin typeface="微軟正黑體" pitchFamily="34" charset="-120"/>
-              <a:ea typeface="微軟正黑體" pitchFamily="34" charset="-120"/>
-            </a:endParaRPr>
-          </a:p>
-          <a:p>
-            <a:pPr algn="ctr">
-              <a:buNone/>
-            </a:pPr>
-            <a:r>
-              <a:rPr lang="zh-TW" altLang="en-US" sz="5400" b="1" dirty="0">
-                <a:latin typeface="微軟正黑體" pitchFamily="34" charset="-120"/>
-                <a:ea typeface="微軟正黑體" pitchFamily="34" charset="-120"/>
-              </a:rPr>
-              <a:t>誠然</a:t>
-            </a:r>
-            <a:r>
-              <a:rPr lang="zh-TW" altLang="en-US" sz="5400" b="1" dirty="0">
-                <a:latin typeface="微軟正黑體" pitchFamily="34" charset="-120"/>
-                <a:ea typeface="微軟正黑體" pitchFamily="34" charset="-120"/>
-              </a:rPr>
-              <a:t>擔起我的</a:t>
-            </a:r>
-            <a:r>
-              <a:rPr lang="zh-TW" altLang="en-US" sz="5400" b="1" dirty="0">
-                <a:latin typeface="微軟正黑體" pitchFamily="34" charset="-120"/>
-                <a:ea typeface="微軟正黑體" pitchFamily="34" charset="-120"/>
-              </a:rPr>
-              <a:t>憂患</a:t>
-            </a:r>
-            <a:endParaRPr lang="en-US" altLang="zh-TW" sz="5400" b="1" dirty="0">
-              <a:latin typeface="微軟正黑體" pitchFamily="34" charset="-120"/>
-              <a:ea typeface="微軟正黑體" pitchFamily="34" charset="-120"/>
-            </a:endParaRPr>
-          </a:p>
-          <a:p>
-            <a:pPr algn="ctr">
-              <a:buNone/>
-            </a:pPr>
-            <a:r>
-              <a:rPr lang="zh-TW" altLang="en-US" sz="5400" b="1" dirty="0">
-                <a:latin typeface="微軟正黑體" pitchFamily="34" charset="-120"/>
-                <a:ea typeface="微軟正黑體" pitchFamily="34" charset="-120"/>
-              </a:rPr>
-              <a:t>背負</a:t>
-            </a:r>
-            <a:r>
-              <a:rPr lang="zh-TW" altLang="en-US" sz="5400" b="1" dirty="0">
-                <a:latin typeface="微軟正黑體" pitchFamily="34" charset="-120"/>
-                <a:ea typeface="微軟正黑體" pitchFamily="34" charset="-120"/>
-              </a:rPr>
-              <a:t>我的</a:t>
-            </a:r>
-            <a:r>
-              <a:rPr lang="zh-TW" altLang="en-US" sz="5400" b="1" dirty="0">
-                <a:latin typeface="微軟正黑體" pitchFamily="34" charset="-120"/>
-                <a:ea typeface="微軟正黑體" pitchFamily="34" charset="-120"/>
-              </a:rPr>
-              <a:t>痛苦</a:t>
-            </a:r>
-            <a:endParaRPr lang="zh-TW" altLang="en-US" sz="5400" b="1" dirty="0">
-              <a:latin typeface="微軟正黑體" pitchFamily="34" charset="-120"/>
-              <a:ea typeface="微軟正黑體" pitchFamily="34" charset="-120"/>
-            </a:endParaRPr>
           </a:p>
         </p:txBody>
       </p:sp>
@@ -3328,111 +3194,150 @@
       </p:grpSpPr>
       <p:sp>
         <p:nvSpPr>
-          <p:cNvPr id="2" name="標題 1"/>
-          <p:cNvSpPr>
-            <a:spLocks noGrp="1"/>
-          </p:cNvSpPr>
-          <p:nvPr>
-            <p:ph type="title"/>
-          </p:nvPr>
-        </p:nvSpPr>
-        <p:spPr/>
-        <p:txBody>
-          <a:bodyPr>
+          <p:cNvPr id="5" name="內容版面配置區 4"/>
+          <p:cNvSpPr>
+            <a:spLocks noGrp="1"/>
+          </p:cNvSpPr>
+          <p:nvPr>
+            <p:ph idx="1"/>
+          </p:nvPr>
+        </p:nvSpPr>
+        <p:spPr>
+          <a:xfrm>
+            <a:off x="0" y="2084851"/>
+            <a:ext cx="12192000" cy="2404863"/>
+          </a:xfrm>
+        </p:spPr>
+        <p:txBody>
+          <a:bodyPr anchor="ctr">
             <a:normAutofit/>
           </a:bodyPr>
           <a:lstStyle/>
           <a:p>
-            <a:r>
-              <a:rPr lang="zh-TW" altLang="en-US" sz="4800" b="1" dirty="0">
+            <a:pPr algn="ctr">
+              <a:buNone/>
+            </a:pPr>
+            <a:r>
+              <a:rPr lang="zh-TW" altLang="en-US" sz="6400" b="1" dirty="0">
+                <a:solidFill>
+                  <a:srgbClr val="660033"/>
+                </a:solidFill>
                 <a:latin typeface="微軟正黑體" pitchFamily="34" charset="-120"/>
                 <a:ea typeface="微軟正黑體" pitchFamily="34" charset="-120"/>
               </a:rPr>
-              <a:t>十架犧牲的愛</a:t>
-            </a:r>
-          </a:p>
-        </p:txBody>
-      </p:sp>
-      <p:sp>
-        <p:nvSpPr>
-          <p:cNvPr id="3" name="內容版面配置區 2"/>
-          <p:cNvSpPr>
-            <a:spLocks noGrp="1"/>
-          </p:cNvSpPr>
-          <p:nvPr>
-            <p:ph idx="1"/>
-          </p:nvPr>
-        </p:nvSpPr>
-        <p:spPr>
-          <a:xfrm>
-            <a:off x="0" y="1600201"/>
-            <a:ext cx="12192000" cy="4525963"/>
-          </a:xfrm>
-        </p:spPr>
-        <p:txBody>
-          <a:bodyPr>
-            <a:normAutofit/>
-          </a:bodyPr>
-          <a:lstStyle/>
+              <a:t>耶穌捨身十架</a:t>
+            </a:r>
+            <a:endParaRPr lang="en-US" altLang="zh-TW" sz="6400" b="1" dirty="0">
+              <a:solidFill>
+                <a:srgbClr val="660033"/>
+              </a:solidFill>
+              <a:latin typeface="微軟正黑體" pitchFamily="34" charset="-120"/>
+              <a:ea typeface="微軟正黑體" pitchFamily="34" charset="-120"/>
+            </a:endParaRPr>
+          </a:p>
           <a:p>
             <a:pPr algn="ctr">
               <a:buNone/>
             </a:pPr>
             <a:r>
-              <a:rPr lang="zh-TW" altLang="en-US" sz="5400" b="1" dirty="0">
+              <a:rPr lang="zh-TW" altLang="en-US" sz="6400" b="1" dirty="0">
+                <a:solidFill>
+                  <a:srgbClr val="660033"/>
+                </a:solidFill>
                 <a:latin typeface="微軟正黑體" pitchFamily="34" charset="-120"/>
                 <a:ea typeface="微軟正黑體" pitchFamily="34" charset="-120"/>
               </a:rPr>
-              <a:t>耶穌捨身</a:t>
-            </a:r>
-            <a:endParaRPr lang="en-US" altLang="zh-TW" sz="5400" b="1" dirty="0">
+              <a:t>主</a:t>
+            </a:r>
+            <a:r>
+              <a:rPr lang="zh-CN" altLang="en-US" sz="6400" b="1" dirty="0">
+                <a:solidFill>
+                  <a:srgbClr val="660033"/>
+                </a:solidFill>
+                <a:latin typeface="微軟正黑體" pitchFamily="34" charset="-120"/>
+                <a:ea typeface="微軟正黑體" pitchFamily="34" charset="-120"/>
+              </a:rPr>
+              <a:t>祢</a:t>
+            </a:r>
+            <a:r>
+              <a:rPr lang="zh-TW" altLang="en-US" sz="6400" b="1" dirty="0">
+                <a:solidFill>
+                  <a:srgbClr val="660033"/>
+                </a:solidFill>
+                <a:latin typeface="微軟正黑體" pitchFamily="34" charset="-120"/>
+                <a:ea typeface="微軟正黑體" pitchFamily="34" charset="-120"/>
+              </a:rPr>
+              <a:t>為我犧牲</a:t>
+            </a:r>
+            <a:endParaRPr lang="en-US" altLang="zh-TW" sz="6400" b="1" dirty="0">
+              <a:solidFill>
+                <a:srgbClr val="660033"/>
+              </a:solidFill>
               <a:latin typeface="微軟正黑體" pitchFamily="34" charset="-120"/>
               <a:ea typeface="微軟正黑體" pitchFamily="34" charset="-120"/>
             </a:endParaRPr>
           </a:p>
-          <a:p>
-            <a:pPr algn="ctr">
-              <a:buNone/>
-            </a:pPr>
-            <a:r>
-              <a:rPr lang="zh-TW" altLang="en-US" sz="5400" b="1" dirty="0">
-                <a:latin typeface="微軟正黑體" pitchFamily="34" charset="-120"/>
-                <a:ea typeface="微軟正黑體" pitchFamily="34" charset="-120"/>
+        </p:txBody>
+      </p:sp>
+      <p:sp>
+        <p:nvSpPr>
+          <p:cNvPr id="3" name="TextBox 2"/>
+          <p:cNvSpPr txBox="1"/>
+          <p:nvPr/>
+        </p:nvSpPr>
+        <p:spPr>
+          <a:xfrm>
+            <a:off x="0" y="5157193"/>
+            <a:ext cx="12192000" cy="584775"/>
+          </a:xfrm>
+          <a:prstGeom prst="rect">
+            <a:avLst/>
+          </a:prstGeom>
+          <a:noFill/>
+        </p:spPr>
+        <p:txBody>
+          <a:bodyPr wrap="square" rtlCol="0">
+            <a:spAutoFit/>
+          </a:bodyPr>
+          <a:lstStyle/>
+          <a:p>
+            <a:pPr algn="ctr"/>
+            <a:r>
+              <a:rPr lang="en-US" sz="3200" b="1" dirty="0">
+                <a:solidFill>
+                  <a:srgbClr val="660033"/>
+                </a:solidFill>
+                <a:latin typeface="Microsoft JhengHei" panose="020B0604030504040204" pitchFamily="34" charset="-120"/>
+                <a:ea typeface="Microsoft JhengHei" panose="020B0604030504040204" pitchFamily="34" charset="-120"/>
               </a:rPr>
-              <a:t>為我的過犯受鞭傷</a:t>
-            </a:r>
-            <a:endParaRPr lang="en-US" altLang="zh-TW" sz="5400" b="1" dirty="0">
-              <a:latin typeface="微軟正黑體" pitchFamily="34" charset="-120"/>
-              <a:ea typeface="微軟正黑體" pitchFamily="34" charset="-120"/>
+              <a:t>( </a:t>
+            </a:r>
+            <a:r>
+              <a:rPr lang="zh-CN" altLang="en-US" sz="3200" b="1" dirty="0">
+                <a:solidFill>
+                  <a:srgbClr val="660033"/>
+                </a:solidFill>
+                <a:latin typeface="Microsoft JhengHei" panose="020B0604030504040204" pitchFamily="34" charset="-120"/>
+                <a:ea typeface="Microsoft JhengHei" panose="020B0604030504040204" pitchFamily="34" charset="-120"/>
+              </a:rPr>
+              <a:t>正歌</a:t>
+            </a:r>
+            <a:r>
+              <a:rPr lang="en-US" sz="3200" b="1" dirty="0">
+                <a:solidFill>
+                  <a:srgbClr val="660033"/>
+                </a:solidFill>
+                <a:latin typeface="Microsoft JhengHei" panose="020B0604030504040204" pitchFamily="34" charset="-120"/>
+                <a:ea typeface="Microsoft JhengHei" panose="020B0604030504040204" pitchFamily="34" charset="-120"/>
+              </a:rPr>
+              <a:t> )</a:t>
+            </a:r>
+            <a:endParaRPr lang="vi-VN" sz="3200" b="1" dirty="0">
+              <a:solidFill>
+                <a:srgbClr val="660033"/>
+              </a:solidFill>
+              <a:ea typeface="Microsoft JhengHei" panose="020B0604030504040204" pitchFamily="34" charset="-120"/>
             </a:endParaRPr>
-          </a:p>
-          <a:p>
-            <a:pPr algn="ctr">
-              <a:buNone/>
-            </a:pPr>
-            <a:r>
-              <a:rPr lang="zh-TW" altLang="en-US" sz="5400" b="1" dirty="0">
-                <a:latin typeface="微軟正黑體" pitchFamily="34" charset="-120"/>
-                <a:ea typeface="微軟正黑體" pitchFamily="34" charset="-120"/>
-              </a:rPr>
-              <a:t>流出寶血   救恩湧流</a:t>
-            </a:r>
-            <a:endParaRPr lang="en-US" altLang="zh-TW" sz="5400" b="1" dirty="0">
-              <a:latin typeface="微軟正黑體" pitchFamily="34" charset="-120"/>
-              <a:ea typeface="微軟正黑體" pitchFamily="34" charset="-120"/>
-            </a:endParaRPr>
-          </a:p>
-          <a:p>
-            <a:pPr algn="ctr">
-              <a:buNone/>
-            </a:pPr>
-            <a:r>
-              <a:rPr lang="zh-TW" altLang="en-US" sz="5400" b="1" dirty="0">
-                <a:latin typeface="微軟正黑體" pitchFamily="34" charset="-120"/>
-                <a:ea typeface="微軟正黑體" pitchFamily="34" charset="-120"/>
-              </a:rPr>
-              <a:t>讓我罪得赦免</a:t>
-            </a:r>
           </a:p>
         </p:txBody>
       </p:sp>
@@ -3463,129 +3368,132 @@
       </p:grpSpPr>
       <p:sp>
         <p:nvSpPr>
-          <p:cNvPr id="2" name="標題 1"/>
-          <p:cNvSpPr>
-            <a:spLocks noGrp="1"/>
-          </p:cNvSpPr>
-          <p:nvPr>
-            <p:ph type="title"/>
-          </p:nvPr>
-        </p:nvSpPr>
-        <p:spPr/>
-        <p:txBody>
-          <a:bodyPr>
+          <p:cNvPr id="5" name="內容版面配置區 4"/>
+          <p:cNvSpPr>
+            <a:spLocks noGrp="1"/>
+          </p:cNvSpPr>
+          <p:nvPr>
+            <p:ph idx="1"/>
+          </p:nvPr>
+        </p:nvSpPr>
+        <p:spPr>
+          <a:xfrm>
+            <a:off x="0" y="2084851"/>
+            <a:ext cx="12192000" cy="2404863"/>
+          </a:xfrm>
+        </p:spPr>
+        <p:txBody>
+          <a:bodyPr anchor="ctr">
             <a:normAutofit/>
           </a:bodyPr>
           <a:lstStyle/>
           <a:p>
-            <a:r>
-              <a:rPr lang="zh-TW" altLang="en-US" sz="4800" b="1" dirty="0">
+            <a:pPr algn="ctr">
+              <a:buNone/>
+            </a:pPr>
+            <a:r>
+              <a:rPr lang="zh-TW" altLang="en-US" sz="6400" b="1" dirty="0">
+                <a:solidFill>
+                  <a:srgbClr val="660033"/>
+                </a:solidFill>
                 <a:latin typeface="微軟正黑體" pitchFamily="34" charset="-120"/>
                 <a:ea typeface="微軟正黑體" pitchFamily="34" charset="-120"/>
               </a:rPr>
-              <a:t>十架犧牲的愛</a:t>
-            </a:r>
-          </a:p>
-        </p:txBody>
-      </p:sp>
-      <p:sp>
-        <p:nvSpPr>
-          <p:cNvPr id="3" name="內容版面配置區 2"/>
-          <p:cNvSpPr>
-            <a:spLocks noGrp="1"/>
-          </p:cNvSpPr>
-          <p:nvPr>
-            <p:ph idx="1"/>
-          </p:nvPr>
-        </p:nvSpPr>
-        <p:spPr>
-          <a:xfrm>
-            <a:off x="-96688" y="1600201"/>
-            <a:ext cx="12288688" cy="4525963"/>
-          </a:xfrm>
-        </p:spPr>
-        <p:txBody>
-          <a:bodyPr>
-            <a:normAutofit/>
-          </a:bodyPr>
-          <a:lstStyle/>
+              <a:t>誠然擔起我的憂患</a:t>
+            </a:r>
+            <a:endParaRPr lang="en-US" altLang="zh-TW" sz="6400" b="1" dirty="0">
+              <a:solidFill>
+                <a:srgbClr val="660033"/>
+              </a:solidFill>
+              <a:latin typeface="微軟正黑體" pitchFamily="34" charset="-120"/>
+              <a:ea typeface="微軟正黑體" pitchFamily="34" charset="-120"/>
+            </a:endParaRPr>
+          </a:p>
           <a:p>
             <a:pPr algn="ctr">
               <a:buNone/>
             </a:pPr>
             <a:r>
-              <a:rPr lang="zh-CN" altLang="en-US" sz="5400" b="1" dirty="0">
+              <a:rPr lang="zh-TW" altLang="en-US" sz="6400" b="1" dirty="0">
+                <a:solidFill>
+                  <a:srgbClr val="660033"/>
+                </a:solidFill>
                 <a:latin typeface="微軟正黑體" pitchFamily="34" charset="-120"/>
                 <a:ea typeface="微軟正黑體" pitchFamily="34" charset="-120"/>
               </a:rPr>
-              <a:t>袮</a:t>
-            </a:r>
-            <a:r>
-              <a:rPr lang="zh-TW" altLang="en-US" sz="5400" b="1" dirty="0" smtClean="0">
-                <a:latin typeface="微軟正黑體" pitchFamily="34" charset="-120"/>
-                <a:ea typeface="微軟正黑體" pitchFamily="34" charset="-120"/>
+              <a:t>背負我的痛苦</a:t>
+            </a:r>
+          </a:p>
+        </p:txBody>
+      </p:sp>
+      <p:sp>
+        <p:nvSpPr>
+          <p:cNvPr id="3" name="TextBox 2"/>
+          <p:cNvSpPr txBox="1"/>
+          <p:nvPr/>
+        </p:nvSpPr>
+        <p:spPr>
+          <a:xfrm>
+            <a:off x="0" y="5157193"/>
+            <a:ext cx="12192000" cy="584775"/>
+          </a:xfrm>
+          <a:prstGeom prst="rect">
+            <a:avLst/>
+          </a:prstGeom>
+          <a:noFill/>
+        </p:spPr>
+        <p:txBody>
+          <a:bodyPr wrap="square" rtlCol="0">
+            <a:spAutoFit/>
+          </a:bodyPr>
+          <a:lstStyle/>
+          <a:p>
+            <a:pPr algn="ctr"/>
+            <a:r>
+              <a:rPr lang="en-US" sz="3200" b="1" dirty="0">
+                <a:solidFill>
+                  <a:srgbClr val="660033"/>
+                </a:solidFill>
+                <a:latin typeface="Microsoft JhengHei" panose="020B0604030504040204" pitchFamily="34" charset="-120"/>
+                <a:ea typeface="Microsoft JhengHei" panose="020B0604030504040204" pitchFamily="34" charset="-120"/>
               </a:rPr>
-              <a:t>被</a:t>
-            </a:r>
-            <a:r>
-              <a:rPr lang="zh-TW" altLang="en-US" sz="5400" b="1" dirty="0">
-                <a:latin typeface="微軟正黑體" pitchFamily="34" charset="-120"/>
-                <a:ea typeface="微軟正黑體" pitchFamily="34" charset="-120"/>
+              <a:t>( </a:t>
+            </a:r>
+            <a:r>
+              <a:rPr lang="zh-CN" altLang="en-US" sz="3200" b="1" dirty="0">
+                <a:solidFill>
+                  <a:srgbClr val="660033"/>
+                </a:solidFill>
+                <a:latin typeface="Microsoft JhengHei" panose="020B0604030504040204" pitchFamily="34" charset="-120"/>
+                <a:ea typeface="Microsoft JhengHei" panose="020B0604030504040204" pitchFamily="34" charset="-120"/>
               </a:rPr>
-              <a:t>世人離棄凌辱</a:t>
-            </a:r>
-            <a:endParaRPr lang="en-US" altLang="zh-TW" sz="5400" b="1" dirty="0">
-              <a:latin typeface="微軟正黑體" pitchFamily="34" charset="-120"/>
-              <a:ea typeface="微軟正黑體" pitchFamily="34" charset="-120"/>
+              <a:t>正歌</a:t>
+            </a:r>
+            <a:r>
+              <a:rPr lang="en-US" sz="3200" b="1" dirty="0">
+                <a:solidFill>
+                  <a:srgbClr val="660033"/>
+                </a:solidFill>
+                <a:latin typeface="Microsoft JhengHei" panose="020B0604030504040204" pitchFamily="34" charset="-120"/>
+                <a:ea typeface="Microsoft JhengHei" panose="020B0604030504040204" pitchFamily="34" charset="-120"/>
+              </a:rPr>
+              <a:t> )</a:t>
+            </a:r>
+            <a:endParaRPr lang="vi-VN" sz="3200" b="1" dirty="0">
+              <a:solidFill>
+                <a:srgbClr val="660033"/>
+              </a:solidFill>
+              <a:ea typeface="Microsoft JhengHei" panose="020B0604030504040204" pitchFamily="34" charset="-120"/>
             </a:endParaRPr>
           </a:p>
-          <a:p>
-            <a:pPr algn="ctr">
-              <a:buNone/>
-            </a:pPr>
-            <a:r>
-              <a:rPr lang="zh-TW" altLang="en-US" sz="5400" b="1" dirty="0">
-                <a:latin typeface="微軟正黑體" pitchFamily="34" charset="-120"/>
-                <a:ea typeface="微軟正黑體" pitchFamily="34" charset="-120"/>
-              </a:rPr>
-              <a:t>至死不退縮</a:t>
-            </a:r>
-            <a:endParaRPr lang="en-US" altLang="zh-TW" sz="5400" b="1" dirty="0">
-              <a:latin typeface="微軟正黑體" pitchFamily="34" charset="-120"/>
-              <a:ea typeface="微軟正黑體" pitchFamily="34" charset="-120"/>
-            </a:endParaRPr>
-          </a:p>
-          <a:p>
-            <a:pPr algn="ctr">
-              <a:buNone/>
-            </a:pPr>
-            <a:r>
-              <a:rPr lang="zh-TW" altLang="en-US" sz="5400" b="1" dirty="0">
-                <a:latin typeface="微軟正黑體" pitchFamily="34" charset="-120"/>
-                <a:ea typeface="微軟正黑體" pitchFamily="34" charset="-120"/>
-              </a:rPr>
-              <a:t>喝下那苦杯</a:t>
-            </a:r>
-            <a:endParaRPr lang="en-US" altLang="zh-TW" sz="5400" b="1" dirty="0">
-              <a:latin typeface="微軟正黑體" pitchFamily="34" charset="-120"/>
-              <a:ea typeface="微軟正黑體" pitchFamily="34" charset="-120"/>
-            </a:endParaRPr>
-          </a:p>
-          <a:p>
-            <a:pPr algn="ctr">
-              <a:buNone/>
-            </a:pPr>
-            <a:r>
-              <a:rPr lang="zh-TW" altLang="en-US" sz="5400" b="1" dirty="0">
-                <a:latin typeface="微軟正黑體" pitchFamily="34" charset="-120"/>
-                <a:ea typeface="微軟正黑體" pitchFamily="34" charset="-120"/>
-              </a:rPr>
-              <a:t>全然成就救贖</a:t>
-            </a:r>
-          </a:p>
         </p:txBody>
       </p:sp>
     </p:spTree>
+    <p:extLst>
+      <p:ext uri="{BB962C8B-B14F-4D97-AF65-F5344CB8AC3E}">
+        <p14:creationId xmlns:p14="http://schemas.microsoft.com/office/powerpoint/2010/main" val="2893959365"/>
+      </p:ext>
+    </p:extLst>
   </p:cSld>
   <p:clrMapOvr>
     <a:masterClrMapping/>
@@ -3612,129 +3520,139 @@
       </p:grpSpPr>
       <p:sp>
         <p:nvSpPr>
-          <p:cNvPr id="2" name="標題 1"/>
-          <p:cNvSpPr>
-            <a:spLocks noGrp="1"/>
-          </p:cNvSpPr>
-          <p:nvPr>
-            <p:ph type="title"/>
-          </p:nvPr>
-        </p:nvSpPr>
-        <p:spPr/>
-        <p:txBody>
-          <a:bodyPr>
+          <p:cNvPr id="5" name="內容版面配置區 4"/>
+          <p:cNvSpPr>
+            <a:spLocks noGrp="1"/>
+          </p:cNvSpPr>
+          <p:nvPr>
+            <p:ph idx="1"/>
+          </p:nvPr>
+        </p:nvSpPr>
+        <p:spPr>
+          <a:xfrm>
+            <a:off x="0" y="2084851"/>
+            <a:ext cx="12192000" cy="2404863"/>
+          </a:xfrm>
+        </p:spPr>
+        <p:txBody>
+          <a:bodyPr anchor="ctr">
             <a:normAutofit/>
           </a:bodyPr>
           <a:lstStyle/>
           <a:p>
-            <a:r>
-              <a:rPr lang="zh-TW" altLang="en-US" sz="4800" b="1" dirty="0">
+            <a:pPr algn="ctr">
+              <a:buNone/>
+            </a:pPr>
+            <a:r>
+              <a:rPr lang="zh-TW" altLang="en-US" sz="6400" b="1" dirty="0">
+                <a:solidFill>
+                  <a:srgbClr val="660033"/>
+                </a:solidFill>
                 <a:latin typeface="微軟正黑體" pitchFamily="34" charset="-120"/>
                 <a:ea typeface="微軟正黑體" pitchFamily="34" charset="-120"/>
               </a:rPr>
-              <a:t>十架犧牲的愛</a:t>
-            </a:r>
-          </a:p>
-        </p:txBody>
-      </p:sp>
-      <p:sp>
-        <p:nvSpPr>
-          <p:cNvPr id="3" name="內容版面配置區 2"/>
-          <p:cNvSpPr>
-            <a:spLocks noGrp="1"/>
-          </p:cNvSpPr>
-          <p:nvPr>
-            <p:ph idx="1"/>
-          </p:nvPr>
-        </p:nvSpPr>
-        <p:spPr>
-          <a:xfrm>
-            <a:off x="0" y="1600201"/>
-            <a:ext cx="12192000" cy="4525963"/>
-          </a:xfrm>
-        </p:spPr>
-        <p:txBody>
-          <a:bodyPr>
-            <a:normAutofit/>
-          </a:bodyPr>
-          <a:lstStyle/>
+              <a:t>耶穌捨身</a:t>
+            </a:r>
+            <a:endParaRPr lang="en-US" altLang="zh-TW" sz="6400" b="1" dirty="0">
+              <a:solidFill>
+                <a:srgbClr val="660033"/>
+              </a:solidFill>
+              <a:latin typeface="微軟正黑體" pitchFamily="34" charset="-120"/>
+              <a:ea typeface="微軟正黑體" pitchFamily="34" charset="-120"/>
+            </a:endParaRPr>
+          </a:p>
           <a:p>
             <a:pPr algn="ctr">
               <a:buNone/>
             </a:pPr>
             <a:r>
-              <a:rPr lang="zh-TW" altLang="en-US" sz="5400" b="1" dirty="0">
+              <a:rPr lang="zh-TW" altLang="en-US" sz="6400" b="1" dirty="0">
+                <a:solidFill>
+                  <a:srgbClr val="660033"/>
+                </a:solidFill>
                 <a:latin typeface="微軟正黑體" pitchFamily="34" charset="-120"/>
                 <a:ea typeface="微軟正黑體" pitchFamily="34" charset="-120"/>
               </a:rPr>
-              <a:t>我主犧牲的愛</a:t>
-            </a:r>
-            <a:endParaRPr lang="en-US" altLang="zh-TW" sz="5400" b="1" dirty="0">
+              <a:t>為我的過犯受鞭傷</a:t>
+            </a:r>
+            <a:endParaRPr lang="en-US" altLang="zh-TW" sz="6400" b="1" dirty="0">
+              <a:solidFill>
+                <a:srgbClr val="660033"/>
+              </a:solidFill>
               <a:latin typeface="微軟正黑體" pitchFamily="34" charset="-120"/>
               <a:ea typeface="微軟正黑體" pitchFamily="34" charset="-120"/>
             </a:endParaRPr>
           </a:p>
-          <a:p>
-            <a:pPr algn="ctr">
-              <a:buNone/>
-            </a:pPr>
-            <a:r>
-              <a:rPr lang="zh-CN" altLang="en-US" sz="5400" b="1" dirty="0">
-                <a:latin typeface="微軟正黑體" pitchFamily="34" charset="-120"/>
-                <a:ea typeface="微軟正黑體" pitchFamily="34" charset="-120"/>
+        </p:txBody>
+      </p:sp>
+      <p:sp>
+        <p:nvSpPr>
+          <p:cNvPr id="3" name="TextBox 2"/>
+          <p:cNvSpPr txBox="1"/>
+          <p:nvPr/>
+        </p:nvSpPr>
+        <p:spPr>
+          <a:xfrm>
+            <a:off x="0" y="5157193"/>
+            <a:ext cx="12192000" cy="584775"/>
+          </a:xfrm>
+          <a:prstGeom prst="rect">
+            <a:avLst/>
+          </a:prstGeom>
+          <a:noFill/>
+        </p:spPr>
+        <p:txBody>
+          <a:bodyPr wrap="square" rtlCol="0">
+            <a:spAutoFit/>
+          </a:bodyPr>
+          <a:lstStyle/>
+          <a:p>
+            <a:pPr algn="ctr"/>
+            <a:r>
+              <a:rPr lang="en-US" sz="3200" b="1" dirty="0">
+                <a:solidFill>
+                  <a:srgbClr val="660033"/>
+                </a:solidFill>
+                <a:latin typeface="Microsoft JhengHei" panose="020B0604030504040204" pitchFamily="34" charset="-120"/>
+                <a:ea typeface="Microsoft JhengHei" panose="020B0604030504040204" pitchFamily="34" charset="-120"/>
               </a:rPr>
-              <a:t>袮</a:t>
-            </a:r>
-            <a:r>
-              <a:rPr lang="zh-TW" altLang="en-US" sz="5400" b="1" dirty="0" smtClean="0">
-                <a:latin typeface="微軟正黑體" pitchFamily="34" charset="-120"/>
-                <a:ea typeface="微軟正黑體" pitchFamily="34" charset="-120"/>
+              <a:t>( </a:t>
+            </a:r>
+            <a:r>
+              <a:rPr lang="zh-CN" altLang="en-US" sz="3200" b="1" dirty="0">
+                <a:solidFill>
+                  <a:srgbClr val="660033"/>
+                </a:solidFill>
+                <a:latin typeface="Microsoft JhengHei" panose="020B0604030504040204" pitchFamily="34" charset="-120"/>
+                <a:ea typeface="Microsoft JhengHei" panose="020B0604030504040204" pitchFamily="34" charset="-120"/>
               </a:rPr>
-              <a:t>為</a:t>
-            </a:r>
-            <a:r>
-              <a:rPr lang="zh-TW" altLang="en-US" sz="5400" b="1" dirty="0">
-                <a:latin typeface="微軟正黑體" pitchFamily="34" charset="-120"/>
-                <a:ea typeface="微軟正黑體" pitchFamily="34" charset="-120"/>
+              <a:t>正歌</a:t>
+            </a:r>
+            <a:r>
+              <a:rPr lang="en-US" sz="3200" b="1" dirty="0">
+                <a:solidFill>
+                  <a:srgbClr val="660033"/>
+                </a:solidFill>
+                <a:latin typeface="Microsoft JhengHei" panose="020B0604030504040204" pitchFamily="34" charset="-120"/>
+                <a:ea typeface="Microsoft JhengHei" panose="020B0604030504040204" pitchFamily="34" charset="-120"/>
               </a:rPr>
-              <a:t>我的過犯</a:t>
-            </a:r>
-            <a:endParaRPr lang="en-US" altLang="zh-TW" sz="5400" b="1" dirty="0">
-              <a:latin typeface="微軟正黑體" pitchFamily="34" charset="-120"/>
-              <a:ea typeface="微軟正黑體" pitchFamily="34" charset="-120"/>
+              <a:t> )</a:t>
+            </a:r>
+            <a:endParaRPr lang="vi-VN" sz="3200" b="1" dirty="0">
+              <a:solidFill>
+                <a:srgbClr val="660033"/>
+              </a:solidFill>
+              <a:ea typeface="Microsoft JhengHei" panose="020B0604030504040204" pitchFamily="34" charset="-120"/>
             </a:endParaRPr>
           </a:p>
-          <a:p>
-            <a:pPr algn="ctr">
-              <a:buNone/>
-            </a:pPr>
-            <a:r>
-              <a:rPr lang="zh-TW" altLang="en-US" sz="5400" b="1" dirty="0">
-                <a:latin typeface="微軟正黑體" pitchFamily="34" charset="-120"/>
-                <a:ea typeface="微軟正黑體" pitchFamily="34" charset="-120"/>
-              </a:rPr>
-              <a:t>撇下榮耀尊貴</a:t>
-            </a:r>
-            <a:endParaRPr lang="en-US" altLang="zh-TW" sz="5400" b="1" dirty="0">
-              <a:latin typeface="微軟正黑體" pitchFamily="34" charset="-120"/>
-              <a:ea typeface="微軟正黑體" pitchFamily="34" charset="-120"/>
-            </a:endParaRPr>
-          </a:p>
-          <a:p>
-            <a:pPr algn="ctr">
-              <a:buNone/>
-            </a:pPr>
-            <a:r>
-              <a:rPr lang="zh-TW" altLang="en-US" sz="5400" b="1" dirty="0">
-                <a:latin typeface="微軟正黑體" pitchFamily="34" charset="-120"/>
-                <a:ea typeface="微軟正黑體" pitchFamily="34" charset="-120"/>
-              </a:rPr>
-              <a:t>降下捨身拯救</a:t>
-            </a:r>
-          </a:p>
         </p:txBody>
       </p:sp>
     </p:spTree>
+    <p:extLst>
+      <p:ext uri="{BB962C8B-B14F-4D97-AF65-F5344CB8AC3E}">
+        <p14:creationId xmlns:p14="http://schemas.microsoft.com/office/powerpoint/2010/main" val="1641468492"/>
+      </p:ext>
+    </p:extLst>
   </p:cSld>
   <p:clrMapOvr>
     <a:masterClrMapping/>
@@ -3761,64 +3679,205 @@
       </p:grpSpPr>
       <p:sp>
         <p:nvSpPr>
-          <p:cNvPr id="2" name="標題 1"/>
-          <p:cNvSpPr>
-            <a:spLocks noGrp="1"/>
-          </p:cNvSpPr>
-          <p:nvPr>
-            <p:ph type="title"/>
-          </p:nvPr>
-        </p:nvSpPr>
-        <p:spPr/>
-        <p:txBody>
-          <a:bodyPr>
+          <p:cNvPr id="5" name="內容版面配置區 4"/>
+          <p:cNvSpPr>
+            <a:spLocks noGrp="1"/>
+          </p:cNvSpPr>
+          <p:nvPr>
+            <p:ph idx="1"/>
+          </p:nvPr>
+        </p:nvSpPr>
+        <p:spPr>
+          <a:xfrm>
+            <a:off x="0" y="2084851"/>
+            <a:ext cx="12192000" cy="2404863"/>
+          </a:xfrm>
+        </p:spPr>
+        <p:txBody>
+          <a:bodyPr anchor="ctr">
             <a:normAutofit/>
           </a:bodyPr>
           <a:lstStyle/>
           <a:p>
-            <a:r>
-              <a:rPr lang="zh-TW" altLang="en-US" sz="4800" b="1" dirty="0">
+            <a:pPr algn="ctr">
+              <a:buNone/>
+            </a:pPr>
+            <a:r>
+              <a:rPr lang="zh-TW" altLang="en-US" sz="6400" b="1" dirty="0">
+                <a:solidFill>
+                  <a:srgbClr val="660033"/>
+                </a:solidFill>
                 <a:latin typeface="微軟正黑體" pitchFamily="34" charset="-120"/>
                 <a:ea typeface="微軟正黑體" pitchFamily="34" charset="-120"/>
               </a:rPr>
-              <a:t>十架犧牲的愛</a:t>
-            </a:r>
-          </a:p>
-        </p:txBody>
-      </p:sp>
-      <p:sp>
-        <p:nvSpPr>
-          <p:cNvPr id="3" name="內容版面配置區 2"/>
-          <p:cNvSpPr>
-            <a:spLocks noGrp="1"/>
-          </p:cNvSpPr>
-          <p:nvPr>
-            <p:ph idx="1"/>
-          </p:nvPr>
-        </p:nvSpPr>
-        <p:spPr>
-          <a:xfrm>
-            <a:off x="0" y="1600201"/>
-            <a:ext cx="12192000" cy="4525963"/>
-          </a:xfrm>
-        </p:spPr>
-        <p:txBody>
-          <a:bodyPr>
-            <a:normAutofit/>
-          </a:bodyPr>
-          <a:lstStyle/>
+              <a:t>流出寶血  救恩湧流</a:t>
+            </a:r>
+            <a:endParaRPr lang="en-US" altLang="zh-TW" sz="6400" b="1" dirty="0">
+              <a:solidFill>
+                <a:srgbClr val="660033"/>
+              </a:solidFill>
+              <a:latin typeface="微軟正黑體" pitchFamily="34" charset="-120"/>
+              <a:ea typeface="微軟正黑體" pitchFamily="34" charset="-120"/>
+            </a:endParaRPr>
+          </a:p>
           <a:p>
             <a:pPr algn="ctr">
               <a:buNone/>
             </a:pPr>
             <a:r>
-              <a:rPr lang="zh-TW" altLang="en-US" sz="5400" b="1" dirty="0">
+              <a:rPr lang="zh-TW" altLang="en-US" sz="6400" b="1" dirty="0">
+                <a:solidFill>
+                  <a:srgbClr val="660033"/>
+                </a:solidFill>
                 <a:latin typeface="微軟正黑體" pitchFamily="34" charset="-120"/>
                 <a:ea typeface="微軟正黑體" pitchFamily="34" charset="-120"/>
               </a:rPr>
-              <a:t>十架犧牲的愛</a:t>
-            </a:r>
-            <a:endParaRPr lang="en-US" altLang="zh-TW" sz="5400" b="1" dirty="0">
+              <a:t>讓我罪得赦免</a:t>
+            </a:r>
+          </a:p>
+        </p:txBody>
+      </p:sp>
+      <p:sp>
+        <p:nvSpPr>
+          <p:cNvPr id="3" name="TextBox 2"/>
+          <p:cNvSpPr txBox="1"/>
+          <p:nvPr/>
+        </p:nvSpPr>
+        <p:spPr>
+          <a:xfrm>
+            <a:off x="0" y="5157193"/>
+            <a:ext cx="12192000" cy="584775"/>
+          </a:xfrm>
+          <a:prstGeom prst="rect">
+            <a:avLst/>
+          </a:prstGeom>
+          <a:noFill/>
+        </p:spPr>
+        <p:txBody>
+          <a:bodyPr wrap="square" rtlCol="0">
+            <a:spAutoFit/>
+          </a:bodyPr>
+          <a:lstStyle/>
+          <a:p>
+            <a:pPr algn="ctr"/>
+            <a:r>
+              <a:rPr lang="en-US" sz="3200" b="1" dirty="0">
+                <a:solidFill>
+                  <a:srgbClr val="660033"/>
+                </a:solidFill>
+                <a:latin typeface="Microsoft JhengHei" panose="020B0604030504040204" pitchFamily="34" charset="-120"/>
+                <a:ea typeface="Microsoft JhengHei" panose="020B0604030504040204" pitchFamily="34" charset="-120"/>
+              </a:rPr>
+              <a:t>( </a:t>
+            </a:r>
+            <a:r>
+              <a:rPr lang="zh-CN" altLang="en-US" sz="3200" b="1" dirty="0">
+                <a:solidFill>
+                  <a:srgbClr val="660033"/>
+                </a:solidFill>
+                <a:latin typeface="Microsoft JhengHei" panose="020B0604030504040204" pitchFamily="34" charset="-120"/>
+                <a:ea typeface="Microsoft JhengHei" panose="020B0604030504040204" pitchFamily="34" charset="-120"/>
+              </a:rPr>
+              <a:t>正歌</a:t>
+            </a:r>
+            <a:r>
+              <a:rPr lang="en-US" sz="3200" b="1" dirty="0">
+                <a:solidFill>
+                  <a:srgbClr val="660033"/>
+                </a:solidFill>
+                <a:latin typeface="Microsoft JhengHei" panose="020B0604030504040204" pitchFamily="34" charset="-120"/>
+                <a:ea typeface="Microsoft JhengHei" panose="020B0604030504040204" pitchFamily="34" charset="-120"/>
+              </a:rPr>
+              <a:t> )</a:t>
+            </a:r>
+            <a:endParaRPr lang="vi-VN" sz="3200" b="1" dirty="0">
+              <a:solidFill>
+                <a:srgbClr val="660033"/>
+              </a:solidFill>
+              <a:ea typeface="Microsoft JhengHei" panose="020B0604030504040204" pitchFamily="34" charset="-120"/>
+            </a:endParaRPr>
+          </a:p>
+        </p:txBody>
+      </p:sp>
+    </p:spTree>
+    <p:extLst>
+      <p:ext uri="{BB962C8B-B14F-4D97-AF65-F5344CB8AC3E}">
+        <p14:creationId xmlns:p14="http://schemas.microsoft.com/office/powerpoint/2010/main" val="725394477"/>
+      </p:ext>
+    </p:extLst>
+  </p:cSld>
+  <p:clrMapOvr>
+    <a:masterClrMapping/>
+  </p:clrMapOvr>
+</p:sld>
+</file>
+
+<file path=ppt/slides/slide6.xml><?xml version="1.0" encoding="utf-8"?>
+<p:sld xmlns:a="http://schemas.openxmlformats.org/drawingml/2006/main" xmlns:r="http://schemas.openxmlformats.org/officeDocument/2006/relationships" xmlns:p="http://schemas.openxmlformats.org/presentationml/2006/main">
+  <p:cSld>
+    <p:spTree>
+      <p:nvGrpSpPr>
+        <p:cNvPr id="1" name=""/>
+        <p:cNvGrpSpPr/>
+        <p:nvPr/>
+      </p:nvGrpSpPr>
+      <p:grpSpPr>
+        <a:xfrm>
+          <a:off x="0" y="0"/>
+          <a:ext cx="0" cy="0"/>
+          <a:chOff x="0" y="0"/>
+          <a:chExt cx="0" cy="0"/>
+        </a:xfrm>
+      </p:grpSpPr>
+      <p:sp>
+        <p:nvSpPr>
+          <p:cNvPr id="5" name="內容版面配置區 4"/>
+          <p:cNvSpPr>
+            <a:spLocks noGrp="1"/>
+          </p:cNvSpPr>
+          <p:nvPr>
+            <p:ph idx="1"/>
+          </p:nvPr>
+        </p:nvSpPr>
+        <p:spPr>
+          <a:xfrm>
+            <a:off x="0" y="2084851"/>
+            <a:ext cx="12192000" cy="2404863"/>
+          </a:xfrm>
+        </p:spPr>
+        <p:txBody>
+          <a:bodyPr anchor="ctr">
+            <a:normAutofit/>
+          </a:bodyPr>
+          <a:lstStyle/>
+          <a:p>
+            <a:pPr algn="ctr">
+              <a:buNone/>
+            </a:pPr>
+            <a:r>
+              <a:rPr lang="zh-CN" altLang="en-US" sz="6400" b="1" dirty="0">
+                <a:solidFill>
+                  <a:srgbClr val="660033"/>
+                </a:solidFill>
+                <a:latin typeface="微軟正黑體" pitchFamily="34" charset="-120"/>
+                <a:ea typeface="微軟正黑體" pitchFamily="34" charset="-120"/>
+              </a:rPr>
+              <a:t>祢</a:t>
+            </a:r>
+            <a:r>
+              <a:rPr lang="zh-TW" altLang="en-US" sz="6400" b="1" dirty="0">
+                <a:solidFill>
+                  <a:srgbClr val="660033"/>
+                </a:solidFill>
+                <a:latin typeface="微軟正黑體" pitchFamily="34" charset="-120"/>
+                <a:ea typeface="微軟正黑體" pitchFamily="34" charset="-120"/>
+              </a:rPr>
+              <a:t>被世人離棄凌辱  至死不退縮</a:t>
+            </a:r>
+            <a:endParaRPr lang="en-US" altLang="zh-TW" sz="6400" b="1" dirty="0">
+              <a:solidFill>
+                <a:srgbClr val="660033"/>
+              </a:solidFill>
               <a:latin typeface="微軟正黑體" pitchFamily="34" charset="-120"/>
               <a:ea typeface="微軟正黑體" pitchFamily="34" charset="-120"/>
             </a:endParaRPr>
@@ -3828,13 +3887,169 @@
               <a:buNone/>
             </a:pPr>
             <a:r>
-              <a:rPr lang="zh-TW" altLang="en-US" sz="5400" b="1" dirty="0">
+              <a:rPr lang="zh-TW" altLang="en-US" sz="6400" b="1" dirty="0">
+                <a:solidFill>
+                  <a:srgbClr val="660033"/>
+                </a:solidFill>
                 <a:latin typeface="微軟正黑體" pitchFamily="34" charset="-120"/>
                 <a:ea typeface="微軟正黑體" pitchFamily="34" charset="-120"/>
               </a:rPr>
-              <a:t>眾罪已得潔淨</a:t>
-            </a:r>
-            <a:endParaRPr lang="en-US" altLang="zh-TW" sz="5400" b="1" dirty="0">
+              <a:t>喝下那苦杯  全然成就救贖</a:t>
+            </a:r>
+          </a:p>
+        </p:txBody>
+      </p:sp>
+      <p:sp>
+        <p:nvSpPr>
+          <p:cNvPr id="3" name="TextBox 2"/>
+          <p:cNvSpPr txBox="1"/>
+          <p:nvPr/>
+        </p:nvSpPr>
+        <p:spPr>
+          <a:xfrm>
+            <a:off x="0" y="5157193"/>
+            <a:ext cx="12192000" cy="584775"/>
+          </a:xfrm>
+          <a:prstGeom prst="rect">
+            <a:avLst/>
+          </a:prstGeom>
+          <a:noFill/>
+        </p:spPr>
+        <p:txBody>
+          <a:bodyPr wrap="square" rtlCol="0">
+            <a:spAutoFit/>
+          </a:bodyPr>
+          <a:lstStyle/>
+          <a:p>
+            <a:pPr algn="ctr"/>
+            <a:r>
+              <a:rPr lang="en-US" sz="3200" b="1" dirty="0">
+                <a:solidFill>
+                  <a:srgbClr val="660033"/>
+                </a:solidFill>
+                <a:latin typeface="Microsoft JhengHei" panose="020B0604030504040204" pitchFamily="34" charset="-120"/>
+                <a:ea typeface="Microsoft JhengHei" panose="020B0604030504040204" pitchFamily="34" charset="-120"/>
+              </a:rPr>
+              <a:t>( </a:t>
+            </a:r>
+            <a:r>
+              <a:rPr lang="zh-CN" altLang="en-US" sz="3200" b="1" dirty="0">
+                <a:solidFill>
+                  <a:srgbClr val="660033"/>
+                </a:solidFill>
+                <a:latin typeface="Microsoft JhengHei" panose="020B0604030504040204" pitchFamily="34" charset="-120"/>
+                <a:ea typeface="Microsoft JhengHei" panose="020B0604030504040204" pitchFamily="34" charset="-120"/>
+              </a:rPr>
+              <a:t>前副歌</a:t>
+            </a:r>
+            <a:r>
+              <a:rPr lang="en-US" sz="3200" b="1" dirty="0">
+                <a:solidFill>
+                  <a:srgbClr val="660033"/>
+                </a:solidFill>
+                <a:latin typeface="Microsoft JhengHei" panose="020B0604030504040204" pitchFamily="34" charset="-120"/>
+                <a:ea typeface="Microsoft JhengHei" panose="020B0604030504040204" pitchFamily="34" charset="-120"/>
+              </a:rPr>
+              <a:t> )</a:t>
+            </a:r>
+            <a:endParaRPr lang="vi-VN" sz="3200" b="1" dirty="0">
+              <a:solidFill>
+                <a:srgbClr val="660033"/>
+              </a:solidFill>
+              <a:ea typeface="Microsoft JhengHei" panose="020B0604030504040204" pitchFamily="34" charset="-120"/>
+            </a:endParaRPr>
+          </a:p>
+        </p:txBody>
+      </p:sp>
+    </p:spTree>
+    <p:extLst>
+      <p:ext uri="{BB962C8B-B14F-4D97-AF65-F5344CB8AC3E}">
+        <p14:creationId xmlns:p14="http://schemas.microsoft.com/office/powerpoint/2010/main" val="2244947645"/>
+      </p:ext>
+    </p:extLst>
+  </p:cSld>
+  <p:clrMapOvr>
+    <a:masterClrMapping/>
+  </p:clrMapOvr>
+</p:sld>
+</file>
+
+<file path=ppt/slides/slide7.xml><?xml version="1.0" encoding="utf-8"?>
+<p:sld xmlns:a="http://schemas.openxmlformats.org/drawingml/2006/main" xmlns:r="http://schemas.openxmlformats.org/officeDocument/2006/relationships" xmlns:p="http://schemas.openxmlformats.org/presentationml/2006/main">
+  <p:cSld>
+    <p:spTree>
+      <p:nvGrpSpPr>
+        <p:cNvPr id="1" name=""/>
+        <p:cNvGrpSpPr/>
+        <p:nvPr/>
+      </p:nvGrpSpPr>
+      <p:grpSpPr>
+        <a:xfrm>
+          <a:off x="0" y="0"/>
+          <a:ext cx="0" cy="0"/>
+          <a:chOff x="0" y="0"/>
+          <a:chExt cx="0" cy="0"/>
+        </a:xfrm>
+      </p:grpSpPr>
+      <p:sp>
+        <p:nvSpPr>
+          <p:cNvPr id="5" name="內容版面配置區 4"/>
+          <p:cNvSpPr>
+            <a:spLocks noGrp="1"/>
+          </p:cNvSpPr>
+          <p:nvPr>
+            <p:ph idx="1"/>
+          </p:nvPr>
+        </p:nvSpPr>
+        <p:spPr>
+          <a:xfrm>
+            <a:off x="0" y="2084851"/>
+            <a:ext cx="12192000" cy="2404863"/>
+          </a:xfrm>
+        </p:spPr>
+        <p:txBody>
+          <a:bodyPr anchor="ctr">
+            <a:normAutofit/>
+          </a:bodyPr>
+          <a:lstStyle/>
+          <a:p>
+            <a:pPr algn="ctr">
+              <a:buNone/>
+            </a:pPr>
+            <a:r>
+              <a:rPr lang="zh-TW" altLang="en-US" sz="6400" b="1" dirty="0">
+                <a:solidFill>
+                  <a:srgbClr val="660033"/>
+                </a:solidFill>
+                <a:latin typeface="微軟正黑體" pitchFamily="34" charset="-120"/>
+                <a:ea typeface="微軟正黑體" pitchFamily="34" charset="-120"/>
+              </a:rPr>
+              <a:t>我主犧牲的愛  </a:t>
+            </a:r>
+            <a:r>
+              <a:rPr lang="zh-CN" altLang="en-US" sz="6400" b="1" dirty="0">
+                <a:solidFill>
+                  <a:srgbClr val="660033"/>
+                </a:solidFill>
+                <a:latin typeface="微軟正黑體" pitchFamily="34" charset="-120"/>
+                <a:ea typeface="微軟正黑體" pitchFamily="34" charset="-120"/>
+              </a:rPr>
+              <a:t>祢</a:t>
+            </a:r>
+            <a:r>
+              <a:rPr lang="zh-TW" altLang="en-US" sz="6400" b="1" dirty="0">
+                <a:solidFill>
+                  <a:srgbClr val="660033"/>
+                </a:solidFill>
+                <a:latin typeface="微軟正黑體" pitchFamily="34" charset="-120"/>
+                <a:ea typeface="微軟正黑體" pitchFamily="34" charset="-120"/>
+              </a:rPr>
+              <a:t>為我的過犯</a:t>
+            </a:r>
+            <a:endParaRPr lang="en-US" altLang="zh-TW" sz="6400" b="1" dirty="0">
+              <a:solidFill>
+                <a:srgbClr val="660033"/>
+              </a:solidFill>
               <a:latin typeface="微軟正黑體" pitchFamily="34" charset="-120"/>
               <a:ea typeface="微軟正黑體" pitchFamily="34" charset="-120"/>
             </a:endParaRPr>
@@ -3844,64 +4059,265 @@
               <a:buNone/>
             </a:pPr>
             <a:r>
-              <a:rPr lang="zh-CN" altLang="en-US" sz="5400" b="1" dirty="0">
+              <a:rPr lang="zh-TW" altLang="en-US" sz="6400" b="1" dirty="0">
+                <a:solidFill>
+                  <a:srgbClr val="660033"/>
+                </a:solidFill>
                 <a:latin typeface="微軟正黑體" pitchFamily="34" charset="-120"/>
                 <a:ea typeface="微軟正黑體" pitchFamily="34" charset="-120"/>
               </a:rPr>
-              <a:t>袮</a:t>
-            </a:r>
-            <a:r>
-              <a:rPr lang="zh-TW" altLang="en-US" sz="5400" b="1" dirty="0" smtClean="0">
+              <a:t>撇下榮耀尊貴  降下捨身拯救</a:t>
+            </a:r>
+          </a:p>
+        </p:txBody>
+      </p:sp>
+      <p:sp>
+        <p:nvSpPr>
+          <p:cNvPr id="3" name="TextBox 2"/>
+          <p:cNvSpPr txBox="1"/>
+          <p:nvPr/>
+        </p:nvSpPr>
+        <p:spPr>
+          <a:xfrm>
+            <a:off x="0" y="5157193"/>
+            <a:ext cx="12192000" cy="584775"/>
+          </a:xfrm>
+          <a:prstGeom prst="rect">
+            <a:avLst/>
+          </a:prstGeom>
+          <a:noFill/>
+        </p:spPr>
+        <p:txBody>
+          <a:bodyPr wrap="square" rtlCol="0">
+            <a:spAutoFit/>
+          </a:bodyPr>
+          <a:lstStyle/>
+          <a:p>
+            <a:pPr algn="ctr"/>
+            <a:r>
+              <a:rPr lang="en-US" sz="3200" b="1" dirty="0">
+                <a:solidFill>
+                  <a:srgbClr val="660033"/>
+                </a:solidFill>
+                <a:latin typeface="Microsoft JhengHei" panose="020B0604030504040204" pitchFamily="34" charset="-120"/>
+                <a:ea typeface="Microsoft JhengHei" panose="020B0604030504040204" pitchFamily="34" charset="-120"/>
+              </a:rPr>
+              <a:t>( </a:t>
+            </a:r>
+            <a:r>
+              <a:rPr lang="zh-CN" altLang="en-US" sz="3200" b="1" dirty="0">
+                <a:solidFill>
+                  <a:srgbClr val="660033"/>
+                </a:solidFill>
+                <a:latin typeface="Microsoft JhengHei" panose="020B0604030504040204" pitchFamily="34" charset="-120"/>
+                <a:ea typeface="Microsoft JhengHei" panose="020B0604030504040204" pitchFamily="34" charset="-120"/>
+              </a:rPr>
+              <a:t>副歌</a:t>
+            </a:r>
+            <a:r>
+              <a:rPr lang="en-US" sz="3200" b="1" dirty="0">
+                <a:solidFill>
+                  <a:srgbClr val="660033"/>
+                </a:solidFill>
+                <a:latin typeface="Microsoft JhengHei" panose="020B0604030504040204" pitchFamily="34" charset="-120"/>
+                <a:ea typeface="Microsoft JhengHei" panose="020B0604030504040204" pitchFamily="34" charset="-120"/>
+              </a:rPr>
+              <a:t> )</a:t>
+            </a:r>
+            <a:endParaRPr lang="vi-VN" sz="3200" b="1" dirty="0">
+              <a:solidFill>
+                <a:srgbClr val="660033"/>
+              </a:solidFill>
+              <a:ea typeface="Microsoft JhengHei" panose="020B0604030504040204" pitchFamily="34" charset="-120"/>
+            </a:endParaRPr>
+          </a:p>
+        </p:txBody>
+      </p:sp>
+    </p:spTree>
+    <p:extLst>
+      <p:ext uri="{BB962C8B-B14F-4D97-AF65-F5344CB8AC3E}">
+        <p14:creationId xmlns:p14="http://schemas.microsoft.com/office/powerpoint/2010/main" val="3011301175"/>
+      </p:ext>
+    </p:extLst>
+  </p:cSld>
+  <p:clrMapOvr>
+    <a:masterClrMapping/>
+  </p:clrMapOvr>
+</p:sld>
+</file>
+
+<file path=ppt/slides/slide8.xml><?xml version="1.0" encoding="utf-8"?>
+<p:sld xmlns:a="http://schemas.openxmlformats.org/drawingml/2006/main" xmlns:r="http://schemas.openxmlformats.org/officeDocument/2006/relationships" xmlns:p="http://schemas.openxmlformats.org/presentationml/2006/main">
+  <p:cSld>
+    <p:spTree>
+      <p:nvGrpSpPr>
+        <p:cNvPr id="1" name=""/>
+        <p:cNvGrpSpPr/>
+        <p:nvPr/>
+      </p:nvGrpSpPr>
+      <p:grpSpPr>
+        <a:xfrm>
+          <a:off x="0" y="0"/>
+          <a:ext cx="0" cy="0"/>
+          <a:chOff x="0" y="0"/>
+          <a:chExt cx="0" cy="0"/>
+        </a:xfrm>
+      </p:grpSpPr>
+      <p:sp>
+        <p:nvSpPr>
+          <p:cNvPr id="5" name="內容版面配置區 4"/>
+          <p:cNvSpPr>
+            <a:spLocks noGrp="1"/>
+          </p:cNvSpPr>
+          <p:nvPr>
+            <p:ph idx="1"/>
+          </p:nvPr>
+        </p:nvSpPr>
+        <p:spPr>
+          <a:xfrm>
+            <a:off x="0" y="2084851"/>
+            <a:ext cx="12192000" cy="2404863"/>
+          </a:xfrm>
+        </p:spPr>
+        <p:txBody>
+          <a:bodyPr anchor="ctr">
+            <a:normAutofit/>
+          </a:bodyPr>
+          <a:lstStyle/>
+          <a:p>
+            <a:pPr algn="ctr">
+              <a:buNone/>
+            </a:pPr>
+            <a:r>
+              <a:rPr lang="zh-TW" altLang="en-US" sz="6400" b="1" dirty="0">
+                <a:solidFill>
+                  <a:srgbClr val="660033"/>
+                </a:solidFill>
                 <a:latin typeface="微軟正黑體" pitchFamily="34" charset="-120"/>
                 <a:ea typeface="微軟正黑體" pitchFamily="34" charset="-120"/>
               </a:rPr>
-              <a:t>是</a:t>
-            </a:r>
-            <a:r>
-              <a:rPr lang="zh-TW" altLang="en-US" sz="5400" b="1" dirty="0">
+              <a:t>十架犧牲的愛  眾罪已得潔淨</a:t>
+            </a:r>
+            <a:endParaRPr lang="en-US" altLang="zh-TW" sz="6400" b="1" dirty="0">
+              <a:solidFill>
+                <a:srgbClr val="660033"/>
+              </a:solidFill>
+              <a:latin typeface="微軟正黑體" pitchFamily="34" charset="-120"/>
+              <a:ea typeface="微軟正黑體" pitchFamily="34" charset="-120"/>
+            </a:endParaRPr>
+          </a:p>
+          <a:p>
+            <a:pPr algn="ctr">
+              <a:buNone/>
+            </a:pPr>
+            <a:r>
+              <a:rPr lang="zh-CN" altLang="en-US" sz="6400" b="1" dirty="0">
+                <a:solidFill>
+                  <a:srgbClr val="660033"/>
+                </a:solidFill>
                 <a:latin typeface="微軟正黑體" pitchFamily="34" charset="-120"/>
                 <a:ea typeface="微軟正黑體" pitchFamily="34" charset="-120"/>
               </a:rPr>
-              <a:t>奴僕君王</a:t>
-            </a:r>
-            <a:endParaRPr lang="en-US" altLang="zh-TW" sz="5400" b="1" dirty="0">
+              <a:t>祢</a:t>
+            </a:r>
+            <a:r>
+              <a:rPr lang="zh-TW" altLang="en-US" sz="6400" b="1" dirty="0">
+                <a:solidFill>
+                  <a:srgbClr val="660033"/>
+                </a:solidFill>
+                <a:latin typeface="微軟正黑體" pitchFamily="34" charset="-120"/>
+                <a:ea typeface="微軟正黑體" pitchFamily="34" charset="-120"/>
+              </a:rPr>
+              <a:t>是奴僕君王  權柄尊貴屬</a:t>
+            </a:r>
+            <a:r>
+              <a:rPr lang="zh-CN" altLang="en-US" sz="6400" b="1" dirty="0">
+                <a:solidFill>
+                  <a:srgbClr val="660033"/>
+                </a:solidFill>
+                <a:latin typeface="微軟正黑體" pitchFamily="34" charset="-120"/>
+                <a:ea typeface="微軟正黑體" pitchFamily="34" charset="-120"/>
+              </a:rPr>
+              <a:t>祢</a:t>
+            </a:r>
+            <a:endParaRPr lang="zh-TW" altLang="en-US" sz="6400" b="1" dirty="0">
+              <a:solidFill>
+                <a:srgbClr val="660033"/>
+              </a:solidFill>
               <a:latin typeface="微軟正黑體" pitchFamily="34" charset="-120"/>
               <a:ea typeface="微軟正黑體" pitchFamily="34" charset="-120"/>
             </a:endParaRPr>
           </a:p>
-          <a:p>
-            <a:pPr algn="ctr">
-              <a:buNone/>
-            </a:pPr>
-            <a:r>
-              <a:rPr lang="zh-TW" altLang="en-US" sz="5400" b="1" dirty="0">
-                <a:latin typeface="微軟正黑體" pitchFamily="34" charset="-120"/>
-                <a:ea typeface="微軟正黑體" pitchFamily="34" charset="-120"/>
+        </p:txBody>
+      </p:sp>
+      <p:sp>
+        <p:nvSpPr>
+          <p:cNvPr id="3" name="TextBox 2"/>
+          <p:cNvSpPr txBox="1"/>
+          <p:nvPr/>
+        </p:nvSpPr>
+        <p:spPr>
+          <a:xfrm>
+            <a:off x="0" y="5157193"/>
+            <a:ext cx="12192000" cy="584775"/>
+          </a:xfrm>
+          <a:prstGeom prst="rect">
+            <a:avLst/>
+          </a:prstGeom>
+          <a:noFill/>
+        </p:spPr>
+        <p:txBody>
+          <a:bodyPr wrap="square" rtlCol="0">
+            <a:spAutoFit/>
+          </a:bodyPr>
+          <a:lstStyle/>
+          <a:p>
+            <a:pPr algn="ctr"/>
+            <a:r>
+              <a:rPr lang="en-US" sz="3200" b="1" dirty="0">
+                <a:solidFill>
+                  <a:srgbClr val="660033"/>
+                </a:solidFill>
+                <a:latin typeface="Microsoft JhengHei" panose="020B0604030504040204" pitchFamily="34" charset="-120"/>
+                <a:ea typeface="Microsoft JhengHei" panose="020B0604030504040204" pitchFamily="34" charset="-120"/>
               </a:rPr>
-              <a:t>權柄尊貴</a:t>
-            </a:r>
-            <a:r>
-              <a:rPr lang="zh-TW" altLang="en-US" sz="5400" b="1" dirty="0" smtClean="0">
-                <a:latin typeface="微軟正黑體" pitchFamily="34" charset="-120"/>
-                <a:ea typeface="微軟正黑體" pitchFamily="34" charset="-120"/>
+              <a:t>( </a:t>
+            </a:r>
+            <a:r>
+              <a:rPr lang="zh-CN" altLang="en-US" sz="3200" b="1" dirty="0">
+                <a:solidFill>
+                  <a:srgbClr val="660033"/>
+                </a:solidFill>
+                <a:latin typeface="Microsoft JhengHei" panose="020B0604030504040204" pitchFamily="34" charset="-120"/>
+                <a:ea typeface="Microsoft JhengHei" panose="020B0604030504040204" pitchFamily="34" charset="-120"/>
               </a:rPr>
-              <a:t>屬</a:t>
-            </a:r>
-            <a:r>
-              <a:rPr lang="zh-CN" altLang="en-US" sz="5400" b="1" dirty="0">
-                <a:latin typeface="微軟正黑體" pitchFamily="34" charset="-120"/>
-                <a:ea typeface="微軟正黑體" pitchFamily="34" charset="-120"/>
+              <a:t>副歌</a:t>
+            </a:r>
+            <a:r>
+              <a:rPr lang="en-US" sz="3200" b="1" dirty="0">
+                <a:solidFill>
+                  <a:srgbClr val="660033"/>
+                </a:solidFill>
+                <a:latin typeface="Microsoft JhengHei" panose="020B0604030504040204" pitchFamily="34" charset="-120"/>
+                <a:ea typeface="Microsoft JhengHei" panose="020B0604030504040204" pitchFamily="34" charset="-120"/>
               </a:rPr>
-              <a:t>袮</a:t>
-            </a:r>
-            <a:endParaRPr lang="zh-TW" altLang="en-US" sz="5400" b="1" dirty="0">
-              <a:latin typeface="微軟正黑體" pitchFamily="34" charset="-120"/>
-              <a:ea typeface="微軟正黑體" pitchFamily="34" charset="-120"/>
+              <a:t> )</a:t>
+            </a:r>
+            <a:endParaRPr lang="vi-VN" sz="3200" b="1" dirty="0">
+              <a:solidFill>
+                <a:srgbClr val="660033"/>
+              </a:solidFill>
+              <a:ea typeface="Microsoft JhengHei" panose="020B0604030504040204" pitchFamily="34" charset="-120"/>
             </a:endParaRPr>
           </a:p>
         </p:txBody>
       </p:sp>
     </p:spTree>
+    <p:extLst>
+      <p:ext uri="{BB962C8B-B14F-4D97-AF65-F5344CB8AC3E}">
+        <p14:creationId xmlns:p14="http://schemas.microsoft.com/office/powerpoint/2010/main" val="1031654544"/>
+      </p:ext>
+    </p:extLst>
   </p:cSld>
   <p:clrMapOvr>
     <a:masterClrMapping/>
